--- a/投影片/民意調查課程簡介.pptx
+++ b/投影片/民意調查課程簡介.pptx
@@ -266,7 +266,7 @@
           <a:p>
             <a:fld id="{5D00DB73-A871-E64A-B111-9D507374B2B8}" type="datetimeFigureOut">
               <a:rPr lang="en-US" smtClean="0"/>
-              <a:t>2/25/26</a:t>
+              <a:t>3/18/26</a:t>
             </a:fld>
             <a:endParaRPr lang="en-US"/>
           </a:p>
@@ -464,7 +464,7 @@
           <a:p>
             <a:fld id="{5D00DB73-A871-E64A-B111-9D507374B2B8}" type="datetimeFigureOut">
               <a:rPr lang="en-US" smtClean="0"/>
-              <a:t>2/25/26</a:t>
+              <a:t>3/18/26</a:t>
             </a:fld>
             <a:endParaRPr lang="en-US"/>
           </a:p>
@@ -672,7 +672,7 @@
           <a:p>
             <a:fld id="{5D00DB73-A871-E64A-B111-9D507374B2B8}" type="datetimeFigureOut">
               <a:rPr lang="en-US" smtClean="0"/>
-              <a:t>2/25/26</a:t>
+              <a:t>3/18/26</a:t>
             </a:fld>
             <a:endParaRPr lang="en-US"/>
           </a:p>
@@ -870,7 +870,7 @@
           <a:p>
             <a:fld id="{5D00DB73-A871-E64A-B111-9D507374B2B8}" type="datetimeFigureOut">
               <a:rPr lang="en-US" smtClean="0"/>
-              <a:t>2/25/26</a:t>
+              <a:t>3/18/26</a:t>
             </a:fld>
             <a:endParaRPr lang="en-US"/>
           </a:p>
@@ -1145,7 +1145,7 @@
           <a:p>
             <a:fld id="{5D00DB73-A871-E64A-B111-9D507374B2B8}" type="datetimeFigureOut">
               <a:rPr lang="en-US" smtClean="0"/>
-              <a:t>2/25/26</a:t>
+              <a:t>3/18/26</a:t>
             </a:fld>
             <a:endParaRPr lang="en-US"/>
           </a:p>
@@ -1410,7 +1410,7 @@
           <a:p>
             <a:fld id="{5D00DB73-A871-E64A-B111-9D507374B2B8}" type="datetimeFigureOut">
               <a:rPr lang="en-US" smtClean="0"/>
-              <a:t>2/25/26</a:t>
+              <a:t>3/18/26</a:t>
             </a:fld>
             <a:endParaRPr lang="en-US"/>
           </a:p>
@@ -1822,7 +1822,7 @@
           <a:p>
             <a:fld id="{5D00DB73-A871-E64A-B111-9D507374B2B8}" type="datetimeFigureOut">
               <a:rPr lang="en-US" smtClean="0"/>
-              <a:t>2/25/26</a:t>
+              <a:t>3/18/26</a:t>
             </a:fld>
             <a:endParaRPr lang="en-US"/>
           </a:p>
@@ -1963,7 +1963,7 @@
           <a:p>
             <a:fld id="{5D00DB73-A871-E64A-B111-9D507374B2B8}" type="datetimeFigureOut">
               <a:rPr lang="en-US" smtClean="0"/>
-              <a:t>2/25/26</a:t>
+              <a:t>3/18/26</a:t>
             </a:fld>
             <a:endParaRPr lang="en-US"/>
           </a:p>
@@ -2076,7 +2076,7 @@
           <a:p>
             <a:fld id="{5D00DB73-A871-E64A-B111-9D507374B2B8}" type="datetimeFigureOut">
               <a:rPr lang="en-US" smtClean="0"/>
-              <a:t>2/25/26</a:t>
+              <a:t>3/18/26</a:t>
             </a:fld>
             <a:endParaRPr lang="en-US"/>
           </a:p>
@@ -2387,7 +2387,7 @@
           <a:p>
             <a:fld id="{5D00DB73-A871-E64A-B111-9D507374B2B8}" type="datetimeFigureOut">
               <a:rPr lang="en-US" smtClean="0"/>
-              <a:t>2/25/26</a:t>
+              <a:t>3/18/26</a:t>
             </a:fld>
             <a:endParaRPr lang="en-US"/>
           </a:p>
@@ -2675,7 +2675,7 @@
           <a:p>
             <a:fld id="{5D00DB73-A871-E64A-B111-9D507374B2B8}" type="datetimeFigureOut">
               <a:rPr lang="en-US" smtClean="0"/>
-              <a:t>2/25/26</a:t>
+              <a:t>3/18/26</a:t>
             </a:fld>
             <a:endParaRPr lang="en-US"/>
           </a:p>
@@ -2916,7 +2916,7 @@
           <a:p>
             <a:fld id="{5D00DB73-A871-E64A-B111-9D507374B2B8}" type="datetimeFigureOut">
               <a:rPr lang="en-US" smtClean="0"/>
-              <a:t>2/25/26</a:t>
+              <a:t>3/18/26</a:t>
             </a:fld>
             <a:endParaRPr lang="en-US"/>
           </a:p>
@@ -4985,7 +4985,7 @@
             </a:r>
             <a:r>
               <a:rPr lang="ja-JP" altLang="en-US" sz="2200"/>
-              <a:t>民意調查的資料分析（一）</a:t>
+              <a:t>民意調查的資料分析（一）、繳交分組報告題目</a:t>
             </a:r>
           </a:p>
           <a:p>
@@ -5129,6 +5129,38 @@
             <a:r>
               <a:rPr lang="en-US" altLang="ja-JP" sz="2200" dirty="0"/>
               <a:t>6/3	</a:t>
+            </a:r>
+            <a:r>
+              <a:rPr lang="ja-JP" altLang="en-US" sz="2200"/>
+              <a:t>期末報告</a:t>
+            </a:r>
+            <a:endParaRPr lang="ja-JP" altLang="en-US" sz="2200">
+              <a:solidFill>
+                <a:srgbClr val="FF0000"/>
+              </a:solidFill>
+            </a:endParaRPr>
+          </a:p>
+          <a:p>
+            <a:pPr>
+              <a:lnSpc>
+                <a:spcPct val="150000"/>
+              </a:lnSpc>
+            </a:pPr>
+            <a:r>
+              <a:rPr lang="ja-JP" altLang="en-US" sz="2200"/>
+              <a:t>第</a:t>
+            </a:r>
+            <a:r>
+              <a:rPr lang="en-US" altLang="ja-JP" sz="2200" dirty="0"/>
+              <a:t>16</a:t>
+            </a:r>
+            <a:r>
+              <a:rPr lang="ja-JP" altLang="en-US" sz="2200"/>
+              <a:t>週：</a:t>
+            </a:r>
+            <a:r>
+              <a:rPr lang="en-US" altLang="ja-JP" sz="2200" dirty="0"/>
+              <a:t>6/10	</a:t>
             </a:r>
             <a:r>
               <a:rPr lang="ja-JP" altLang="en-US" sz="2200">
@@ -5138,33 +5170,7 @@
               </a:rPr>
               <a:t>期末考</a:t>
             </a:r>
-          </a:p>
-          <a:p>
-            <a:pPr>
-              <a:lnSpc>
-                <a:spcPct val="150000"/>
-              </a:lnSpc>
-            </a:pPr>
-            <a:r>
-              <a:rPr lang="ja-JP" altLang="en-US" sz="2200"/>
-              <a:t>第</a:t>
-            </a:r>
-            <a:r>
-              <a:rPr lang="en-US" altLang="ja-JP" sz="2200" dirty="0"/>
-              <a:t>16</a:t>
-            </a:r>
-            <a:r>
-              <a:rPr lang="ja-JP" altLang="en-US" sz="2200"/>
-              <a:t>週：</a:t>
-            </a:r>
-            <a:r>
-              <a:rPr lang="en-US" altLang="ja-JP" sz="2200" dirty="0"/>
-              <a:t>6/10	</a:t>
-            </a:r>
-            <a:r>
-              <a:rPr lang="ja-JP" altLang="en-US" sz="2200"/>
-              <a:t>期末報告</a:t>
-            </a:r>
+            <a:endParaRPr lang="ja-JP" altLang="en-US" sz="2200"/>
           </a:p>
           <a:p>
             <a:pPr>

--- a/投影片/民意調查課程簡介.pptx
+++ b/投影片/民意調查課程簡介.pptx
@@ -4775,7 +4775,7 @@
             </a:r>
             <a:r>
               <a:rPr lang="ja-JP" altLang="en-US" sz="2200"/>
-              <a:t>參觀民調中心、民意調查的執行</a:t>
+              <a:t>民意調查的問卷設計（一）</a:t>
             </a:r>
           </a:p>
           <a:p>
@@ -4802,8 +4802,9 @@
             </a:r>
             <a:r>
               <a:rPr lang="ja-JP" altLang="en-US" sz="2200"/>
-              <a:t>民意調查的問卷設計（一）</a:t>
-            </a:r>
+              <a:t>民意調查的問卷設計（二）</a:t>
+            </a:r>
+            <a:endParaRPr lang="en-US" altLang="ja-JP" sz="2200" dirty="0"/>
           </a:p>
           <a:p>
             <a:pPr>
@@ -4958,7 +4959,7 @@
             </a:r>
             <a:r>
               <a:rPr lang="ja-JP" altLang="en-US" sz="2200"/>
-              <a:t>民意調查的問卷設計（二）</a:t>
+              <a:t>參觀選研中心、民意調查的執行</a:t>
             </a:r>
           </a:p>
           <a:p>

--- a/投影片/民意調查課程簡介.pptx
+++ b/投影片/民意調查課程簡介.pptx
@@ -266,7 +266,7 @@
           <a:p>
             <a:fld id="{5D00DB73-A871-E64A-B111-9D507374B2B8}" type="datetimeFigureOut">
               <a:rPr lang="en-US" smtClean="0"/>
-              <a:t>3/18/26</a:t>
+              <a:t>3/19/26</a:t>
             </a:fld>
             <a:endParaRPr lang="en-US"/>
           </a:p>
@@ -464,7 +464,7 @@
           <a:p>
             <a:fld id="{5D00DB73-A871-E64A-B111-9D507374B2B8}" type="datetimeFigureOut">
               <a:rPr lang="en-US" smtClean="0"/>
-              <a:t>3/18/26</a:t>
+              <a:t>3/19/26</a:t>
             </a:fld>
             <a:endParaRPr lang="en-US"/>
           </a:p>
@@ -672,7 +672,7 @@
           <a:p>
             <a:fld id="{5D00DB73-A871-E64A-B111-9D507374B2B8}" type="datetimeFigureOut">
               <a:rPr lang="en-US" smtClean="0"/>
-              <a:t>3/18/26</a:t>
+              <a:t>3/19/26</a:t>
             </a:fld>
             <a:endParaRPr lang="en-US"/>
           </a:p>
@@ -870,7 +870,7 @@
           <a:p>
             <a:fld id="{5D00DB73-A871-E64A-B111-9D507374B2B8}" type="datetimeFigureOut">
               <a:rPr lang="en-US" smtClean="0"/>
-              <a:t>3/18/26</a:t>
+              <a:t>3/19/26</a:t>
             </a:fld>
             <a:endParaRPr lang="en-US"/>
           </a:p>
@@ -1145,7 +1145,7 @@
           <a:p>
             <a:fld id="{5D00DB73-A871-E64A-B111-9D507374B2B8}" type="datetimeFigureOut">
               <a:rPr lang="en-US" smtClean="0"/>
-              <a:t>3/18/26</a:t>
+              <a:t>3/19/26</a:t>
             </a:fld>
             <a:endParaRPr lang="en-US"/>
           </a:p>
@@ -1410,7 +1410,7 @@
           <a:p>
             <a:fld id="{5D00DB73-A871-E64A-B111-9D507374B2B8}" type="datetimeFigureOut">
               <a:rPr lang="en-US" smtClean="0"/>
-              <a:t>3/18/26</a:t>
+              <a:t>3/19/26</a:t>
             </a:fld>
             <a:endParaRPr lang="en-US"/>
           </a:p>
@@ -1822,7 +1822,7 @@
           <a:p>
             <a:fld id="{5D00DB73-A871-E64A-B111-9D507374B2B8}" type="datetimeFigureOut">
               <a:rPr lang="en-US" smtClean="0"/>
-              <a:t>3/18/26</a:t>
+              <a:t>3/19/26</a:t>
             </a:fld>
             <a:endParaRPr lang="en-US"/>
           </a:p>
@@ -1963,7 +1963,7 @@
           <a:p>
             <a:fld id="{5D00DB73-A871-E64A-B111-9D507374B2B8}" type="datetimeFigureOut">
               <a:rPr lang="en-US" smtClean="0"/>
-              <a:t>3/18/26</a:t>
+              <a:t>3/19/26</a:t>
             </a:fld>
             <a:endParaRPr lang="en-US"/>
           </a:p>
@@ -2076,7 +2076,7 @@
           <a:p>
             <a:fld id="{5D00DB73-A871-E64A-B111-9D507374B2B8}" type="datetimeFigureOut">
               <a:rPr lang="en-US" smtClean="0"/>
-              <a:t>3/18/26</a:t>
+              <a:t>3/19/26</a:t>
             </a:fld>
             <a:endParaRPr lang="en-US"/>
           </a:p>
@@ -2387,7 +2387,7 @@
           <a:p>
             <a:fld id="{5D00DB73-A871-E64A-B111-9D507374B2B8}" type="datetimeFigureOut">
               <a:rPr lang="en-US" smtClean="0"/>
-              <a:t>3/18/26</a:t>
+              <a:t>3/19/26</a:t>
             </a:fld>
             <a:endParaRPr lang="en-US"/>
           </a:p>
@@ -2675,7 +2675,7 @@
           <a:p>
             <a:fld id="{5D00DB73-A871-E64A-B111-9D507374B2B8}" type="datetimeFigureOut">
               <a:rPr lang="en-US" smtClean="0"/>
-              <a:t>3/18/26</a:t>
+              <a:t>3/19/26</a:t>
             </a:fld>
             <a:endParaRPr lang="en-US"/>
           </a:p>
@@ -2916,7 +2916,7 @@
           <a:p>
             <a:fld id="{5D00DB73-A871-E64A-B111-9D507374B2B8}" type="datetimeFigureOut">
               <a:rPr lang="en-US" smtClean="0"/>
-              <a:t>3/18/26</a:t>
+              <a:t>3/19/26</a:t>
             </a:fld>
             <a:endParaRPr lang="en-US"/>
           </a:p>
@@ -4959,7 +4959,7 @@
             </a:r>
             <a:r>
               <a:rPr lang="ja-JP" altLang="en-US" sz="2200"/>
-              <a:t>參觀選研中心、民意調查的執行</a:t>
+              <a:t>參訪選研中心</a:t>
             </a:r>
           </a:p>
           <a:p>
